--- a/public/fun/pack/pptx/familypro/가족소개프리미엄_17_아이와함께_코발트아이보리.pptx
+++ b/public/fun/pack/pptx/familypro/가족소개프리미엄_17_아이와함께_코발트아이보리.pptx
@@ -113,12 +113,12 @@
   <p:extLst>
     <p:ext uri="{521415D9-36F7-43E2-AB2F-B90AF26B5E84}">
       <p14:sectionLst xmlns:p14="http://schemas.microsoft.com/office/powerpoint/2010/main">
-        <p14:section name="시작" id="{B72F5641-4429-4AA8-AEEB-40BD02CDA94F}">
+        <p14:section name="시작" id="{4F481459-7044-46E4-B5BD-A3557B23BF78}">
           <p14:sldIdLst>
             <p14:sldId id="256"/>
           </p14:sldIdLst>
         </p14:section>
-        <p14:section name="본문" id="{D715DE71-6151-4FD5-9DBA-DBB00FAE07D4}">
+        <p14:section name="본문" id="{4B25911E-DFC8-4379-B81E-F82A9ADD379B}">
           <p14:sldIdLst>
             <p14:sldId id="257"/>
             <p14:sldId id="258"/>
@@ -127,7 +127,7 @@
             <p14:sldId id="261"/>
           </p14:sldIdLst>
         </p14:section>
-        <p14:section name="마무리" id="{63AB29A8-CADD-41F4-8B4B-7E3C0858861E}">
+        <p14:section name="마무리" id="{7C6D5FE1-1A0A-4293-BFAE-6C5429C2B0D0}">
           <p14:sldIdLst>
             <p14:sldId id="262"/>
           </p14:sldIdLst>
@@ -1539,7 +1539,7 @@
             </a:lvl1pPr>
           </a:lstStyle>
           <a:p>
-            <a:fld id="{11C2E880-BCC4-4F40-942D-36353C76DF06}" type="slidenum">
+            <a:fld id="{B78C0E21-C55A-48F5-B852-57ED6038783C}" type="slidenum">
               <a:rPr lang="en-US"/>
               <a:t>‹#›</a:t>
             </a:fld>
@@ -2172,7 +2172,7 @@
             </a:lvl1pPr>
           </a:lstStyle>
           <a:p>
-            <a:fld id="{4AD89C0E-C325-43FB-86F1-68092085FC32}" type="slidenum">
+            <a:fld id="{9E858AA7-DCED-4711-8C26-EB4C28E38005}" type="slidenum">
               <a:rPr lang="en-US"/>
               <a:t>‹#›</a:t>
             </a:fld>
@@ -2809,7 +2809,7 @@
             </a:lvl1pPr>
           </a:lstStyle>
           <a:p>
-            <a:fld id="{FA28A471-1D48-4D9F-8CE7-F65649FD90A2}" type="slidenum">
+            <a:fld id="{1D87DF47-1259-43FD-85EE-73B68264D45F}" type="slidenum">
               <a:rPr lang="en-US"/>
               <a:t>‹#›</a:t>
             </a:fld>
@@ -3670,7 +3670,7 @@
           <a:p>
             <a:r>
               <a:rPr lang="ko-KR"/>
-              <a:t>아이와 함께 · 0000. 00. 00</a:t>
+              <a:t>아이와 함께 · 날짜 입력</a:t>
             </a:r>
           </a:p>
         </p:txBody>
@@ -4055,7 +4055,7 @@
           <a:bodyPr/>
           <a:lstStyle/>
           <a:p>
-            <a:fld id="{47791B48-7E23-48E5-9B9A-545BC136D2F3}" type="slidenum">
+            <a:fld id="{5151ED97-A2F7-459F-BE54-340AA7E7CDC4}" type="slidenum">
               <a:rPr lang="en-US"/>
               <a:t>‹#›</a:t>
             </a:fld>
@@ -4879,7 +4879,7 @@
           <a:bodyPr/>
           <a:lstStyle/>
           <a:p>
-            <a:fld id="{FBAC83DB-F4FA-43F9-A7E3-3450CF39D408}" type="slidenum">
+            <a:fld id="{A75D2B97-D8CC-4E7C-9A8D-C52B6571F9B2}" type="slidenum">
               <a:rPr lang="en-US"/>
               <a:t>‹#›</a:t>
             </a:fld>
@@ -5721,7 +5721,7 @@
           <a:bodyPr/>
           <a:lstStyle/>
           <a:p>
-            <a:fld id="{38500A98-C532-472B-B3DA-04222CE3A958}" type="slidenum">
+            <a:fld id="{B743AF00-23FD-4471-952A-AB908B39D26C}" type="slidenum">
               <a:rPr lang="en-US"/>
               <a:t>‹#›</a:t>
             </a:fld>
@@ -7099,7 +7099,7 @@
           <a:bodyPr/>
           <a:lstStyle/>
           <a:p>
-            <a:fld id="{7507C53A-448B-48F4-864A-46DBC4270D93}" type="slidenum">
+            <a:fld id="{D10B11EB-D629-4289-AA24-BBF37F401F4B}" type="slidenum">
               <a:rPr lang="en-US"/>
               <a:t>‹#›</a:t>
             </a:fld>
@@ -7187,7 +7187,7 @@
           <a:bodyPr/>
           <a:lstStyle/>
           <a:p>
-            <a:fld id="{F72C405A-2966-4FC0-941F-29DF8A79143D}" type="slidenum">
+            <a:fld id="{841ACFC6-89B2-473D-A059-9105F7785CC7}" type="slidenum">
               <a:rPr lang="en-US"/>
               <a:t>‹#›</a:t>
             </a:fld>
